--- a/AeroAdaptGAN_Presentation-FINAL.pptx
+++ b/AeroAdaptGAN_Presentation-FINAL.pptx
@@ -9256,7 +9256,7 @@
           <a:p>
             <a:fld id="{DF44D0AE-F6C3-48C5-AA54-924E529F703F}" type="datetimeFigureOut">
               <a:rPr lang="en-US" smtClean="0"/>
-              <a:t>4/29/2025</a:t>
+              <a:t>5/2/2025</a:t>
             </a:fld>
             <a:endParaRPr lang="en-US"/>
           </a:p>
@@ -11477,7 +11477,7 @@
           <a:p>
             <a:fld id="{5BCAD085-E8A6-8845-BD4E-CB4CCA059FC4}" type="datetimeFigureOut">
               <a:rPr lang="en-US" smtClean="0"/>
-              <a:t>4/29/2025</a:t>
+              <a:t>5/2/2025</a:t>
             </a:fld>
             <a:endParaRPr lang="en-US"/>
           </a:p>
@@ -11723,7 +11723,7 @@
           <a:p>
             <a:fld id="{5BCAD085-E8A6-8845-BD4E-CB4CCA059FC4}" type="datetimeFigureOut">
               <a:rPr lang="en-US" smtClean="0"/>
-              <a:t>4/29/2025</a:t>
+              <a:t>5/2/2025</a:t>
             </a:fld>
             <a:endParaRPr lang="en-US"/>
           </a:p>
@@ -11981,7 +11981,7 @@
           <a:p>
             <a:fld id="{5BCAD085-E8A6-8845-BD4E-CB4CCA059FC4}" type="datetimeFigureOut">
               <a:rPr lang="en-US" smtClean="0"/>
-              <a:t>4/29/2025</a:t>
+              <a:t>5/2/2025</a:t>
             </a:fld>
             <a:endParaRPr lang="en-US"/>
           </a:p>
@@ -12151,7 +12151,7 @@
           <a:p>
             <a:fld id="{5BCAD085-E8A6-8845-BD4E-CB4CCA059FC4}" type="datetimeFigureOut">
               <a:rPr lang="en-US" smtClean="0"/>
-              <a:t>4/29/2025</a:t>
+              <a:t>5/2/2025</a:t>
             </a:fld>
             <a:endParaRPr lang="en-US"/>
           </a:p>
@@ -12450,7 +12450,7 @@
           <a:p>
             <a:fld id="{5BCAD085-E8A6-8845-BD4E-CB4CCA059FC4}" type="datetimeFigureOut">
               <a:rPr lang="en-US" smtClean="0"/>
-              <a:t>4/29/2025</a:t>
+              <a:t>5/2/2025</a:t>
             </a:fld>
             <a:endParaRPr lang="en-US"/>
           </a:p>
@@ -12763,7 +12763,7 @@
           <a:p>
             <a:fld id="{5BCAD085-E8A6-8845-BD4E-CB4CCA059FC4}" type="datetimeFigureOut">
               <a:rPr lang="en-US" smtClean="0"/>
-              <a:t>4/29/2025</a:t>
+              <a:t>5/2/2025</a:t>
             </a:fld>
             <a:endParaRPr lang="en-US"/>
           </a:p>
@@ -13142,7 +13142,7 @@
           <a:p>
             <a:fld id="{5BCAD085-E8A6-8845-BD4E-CB4CCA059FC4}" type="datetimeFigureOut">
               <a:rPr lang="en-US" smtClean="0"/>
-              <a:t>4/29/2025</a:t>
+              <a:t>5/2/2025</a:t>
             </a:fld>
             <a:endParaRPr lang="en-US"/>
           </a:p>
@@ -13260,7 +13260,7 @@
           <a:p>
             <a:fld id="{5BCAD085-E8A6-8845-BD4E-CB4CCA059FC4}" type="datetimeFigureOut">
               <a:rPr lang="en-US" smtClean="0"/>
-              <a:t>4/29/2025</a:t>
+              <a:t>5/2/2025</a:t>
             </a:fld>
             <a:endParaRPr lang="en-US"/>
           </a:p>
@@ -13433,7 +13433,7 @@
           <a:p>
             <a:fld id="{5BCAD085-E8A6-8845-BD4E-CB4CCA059FC4}" type="datetimeFigureOut">
               <a:rPr lang="en-US" smtClean="0"/>
-              <a:t>4/29/2025</a:t>
+              <a:t>5/2/2025</a:t>
             </a:fld>
             <a:endParaRPr lang="en-US"/>
           </a:p>
@@ -13789,7 +13789,7 @@
           <a:p>
             <a:fld id="{5BCAD085-E8A6-8845-BD4E-CB4CCA059FC4}" type="datetimeFigureOut">
               <a:rPr lang="en-US" smtClean="0"/>
-              <a:t>4/29/2025</a:t>
+              <a:t>5/2/2025</a:t>
             </a:fld>
             <a:endParaRPr lang="en-US"/>
           </a:p>
@@ -14168,7 +14168,7 @@
           <a:p>
             <a:fld id="{5BCAD085-E8A6-8845-BD4E-CB4CCA059FC4}" type="datetimeFigureOut">
               <a:rPr lang="en-US" smtClean="0"/>
-              <a:t>4/29/2025</a:t>
+              <a:t>5/2/2025</a:t>
             </a:fld>
             <a:endParaRPr lang="en-US"/>
           </a:p>
@@ -14457,7 +14457,7 @@
           <a:p>
             <a:fld id="{5BCAD085-E8A6-8845-BD4E-CB4CCA059FC4}" type="datetimeFigureOut">
               <a:rPr lang="en-US" smtClean="0"/>
-              <a:t>4/29/2025</a:t>
+              <a:t>5/2/2025</a:t>
             </a:fld>
             <a:endParaRPr lang="en-US"/>
           </a:p>
@@ -15757,7 +15757,7 @@
             <p:ph idx="1"/>
             <p:extLst>
               <p:ext uri="{D42A27DB-BD31-4B8C-83A1-F6EECF244321}">
-                <p14:modId xmlns:p14="http://schemas.microsoft.com/office/powerpoint/2010/main" val="3004763648"/>
+                <p14:modId xmlns:p14="http://schemas.microsoft.com/office/powerpoint/2010/main" val="47635197"/>
               </p:ext>
             </p:extLst>
           </p:nvPr>
@@ -15773,24 +15773,31 @@
                 <a:tableStyleId>{5C22544A-7EE6-4342-B048-85BDC9FD1C3A}</a:tableStyleId>
               </a:tblPr>
               <a:tblGrid>
-                <a:gridCol w="2895600">
+                <a:gridCol w="2171700">
                   <a:extLst>
                     <a:ext uri="{9D8B030D-6E8A-4147-A177-3AD203B41FA5}">
                       <a16:colId xmlns:a16="http://schemas.microsoft.com/office/drawing/2014/main" val="805573667"/>
                     </a:ext>
                   </a:extLst>
                 </a:gridCol>
-                <a:gridCol w="2895600">
+                <a:gridCol w="2171700">
                   <a:extLst>
                     <a:ext uri="{9D8B030D-6E8A-4147-A177-3AD203B41FA5}">
                       <a16:colId xmlns:a16="http://schemas.microsoft.com/office/drawing/2014/main" val="3869638111"/>
                     </a:ext>
                   </a:extLst>
                 </a:gridCol>
-                <a:gridCol w="2895600">
+                <a:gridCol w="2171700">
                   <a:extLst>
                     <a:ext uri="{9D8B030D-6E8A-4147-A177-3AD203B41FA5}">
                       <a16:colId xmlns:a16="http://schemas.microsoft.com/office/drawing/2014/main" val="510887149"/>
+                    </a:ext>
+                  </a:extLst>
+                </a:gridCol>
+                <a:gridCol w="2171700">
+                  <a:extLst>
+                    <a:ext uri="{9D8B030D-6E8A-4147-A177-3AD203B41FA5}">
+                      <a16:colId xmlns:a16="http://schemas.microsoft.com/office/drawing/2014/main" val="2021091355"/>
                     </a:ext>
                   </a:extLst>
                 </a:gridCol>
@@ -15838,6 +15845,20 @@
                   </a:txBody>
                   <a:tcPr/>
                 </a:tc>
+                <a:tc>
+                  <a:txBody>
+                    <a:bodyPr/>
+                    <a:lstStyle/>
+                    <a:p>
+                      <a:pPr algn="l" rtl="0"/>
+                      <a:r>
+                        <a:rPr lang="en-US" dirty="0"/>
+                        <a:t>Experiment 3</a:t>
+                      </a:r>
+                    </a:p>
+                  </a:txBody>
+                  <a:tcPr/>
+                </a:tc>
                 <a:extLst>
                   <a:ext uri="{0D108BD9-81ED-4DB2-BD59-A6C34878D82A}">
                     <a16:rowId xmlns:a16="http://schemas.microsoft.com/office/drawing/2014/main" val="773978751"/>
@@ -15852,7 +15873,7 @@
                     <a:p>
                       <a:pPr algn="l" rtl="0"/>
                       <a:r>
-                        <a:rPr lang="en-US" dirty="0"/>
+                        <a:rPr lang="en-US" sz="1600" b="1" dirty="0"/>
                         <a:t>Stopping </a:t>
                       </a:r>
                     </a:p>
@@ -15864,28 +15885,42 @@
                     <a:bodyPr/>
                     <a:lstStyle/>
                     <a:p>
-                      <a:pPr algn="l" rtl="0"/>
+                      <a:pPr algn="ctr" rtl="0"/>
                       <a:r>
                         <a:rPr lang="en-US" dirty="0"/>
                         <a:t>Early Stopping</a:t>
                       </a:r>
                     </a:p>
                   </a:txBody>
-                  <a:tcPr/>
+                  <a:tcPr anchor="ctr"/>
                 </a:tc>
                 <a:tc>
                   <a:txBody>
                     <a:bodyPr/>
                     <a:lstStyle/>
                     <a:p>
-                      <a:pPr algn="l" rtl="0"/>
+                      <a:pPr algn="ctr" rtl="0"/>
                       <a:r>
                         <a:rPr lang="en-US" dirty="0"/>
                         <a:t>No Early Stopping</a:t>
                       </a:r>
                     </a:p>
                   </a:txBody>
-                  <a:tcPr/>
+                  <a:tcPr anchor="ctr"/>
+                </a:tc>
+                <a:tc>
+                  <a:txBody>
+                    <a:bodyPr/>
+                    <a:lstStyle/>
+                    <a:p>
+                      <a:pPr algn="ctr" rtl="0"/>
+                      <a:r>
+                        <a:rPr lang="en-US" dirty="0"/>
+                        <a:t>Until Convergence</a:t>
+                      </a:r>
+                    </a:p>
+                  </a:txBody>
+                  <a:tcPr anchor="ctr"/>
                 </a:tc>
                 <a:extLst>
                   <a:ext uri="{0D108BD9-81ED-4DB2-BD59-A6C34878D82A}">
@@ -15901,7 +15936,7 @@
                     <a:p>
                       <a:pPr algn="l" rtl="0"/>
                       <a:r>
-                        <a:rPr lang="en-US" dirty="0"/>
+                        <a:rPr lang="en-US" sz="1600" b="1" dirty="0"/>
                         <a:t>Generator Loss and Discriminator Accuracy</a:t>
                       </a:r>
                     </a:p>
@@ -15913,28 +15948,62 @@
                     <a:bodyPr/>
                     <a:lstStyle/>
                     <a:p>
-                      <a:pPr algn="l" rtl="0"/>
+                      <a:pPr algn="ctr" rtl="0"/>
                       <a:r>
                         <a:rPr lang="en-US" dirty="0"/>
                         <a:t>MSE (L2 loss)</a:t>
                       </a:r>
                     </a:p>
                   </a:txBody>
-                  <a:tcPr/>
+                  <a:tcPr anchor="ctr"/>
                 </a:tc>
                 <a:tc>
                   <a:txBody>
                     <a:bodyPr/>
                     <a:lstStyle/>
                     <a:p>
-                      <a:pPr algn="l" rtl="0"/>
+                      <a:pPr algn="ctr" rtl="0"/>
                       <a:r>
                         <a:rPr lang="en-US" dirty="0"/>
                         <a:t>Binary cross entropy (BCE)</a:t>
                       </a:r>
                     </a:p>
                   </a:txBody>
-                  <a:tcPr/>
+                  <a:tcPr anchor="ctr"/>
+                </a:tc>
+                <a:tc>
+                  <a:txBody>
+                    <a:bodyPr/>
+                    <a:lstStyle/>
+                    <a:p>
+                      <a:pPr marL="0" marR="0" lvl="0" indent="0" algn="ctr" defTabSz="914400" rtl="0" eaLnBrk="1" fontAlgn="auto" latinLnBrk="0" hangingPunct="1">
+                        <a:lnSpc>
+                          <a:spcPct val="100000"/>
+                        </a:lnSpc>
+                        <a:spcBef>
+                          <a:spcPts val="0"/>
+                        </a:spcBef>
+                        <a:spcAft>
+                          <a:spcPts val="0"/>
+                        </a:spcAft>
+                        <a:buClrTx/>
+                        <a:buSzTx/>
+                        <a:buFontTx/>
+                        <a:buNone/>
+                        <a:tabLst/>
+                        <a:defRPr/>
+                      </a:pPr>
+                      <a:r>
+                        <a:rPr lang="en-US" dirty="0"/>
+                        <a:t>Binary cross entropy (BCE)</a:t>
+                      </a:r>
+                    </a:p>
+                    <a:p>
+                      <a:pPr algn="ctr" rtl="0"/>
+                      <a:endParaRPr lang="en-US" dirty="0"/>
+                    </a:p>
+                  </a:txBody>
+                  <a:tcPr anchor="ctr"/>
                 </a:tc>
                 <a:extLst>
                   <a:ext uri="{0D108BD9-81ED-4DB2-BD59-A6C34878D82A}">
@@ -15950,8 +16019,8 @@
                     <a:p>
                       <a:pPr algn="l" rtl="0"/>
                       <a:r>
-                        <a:rPr lang="en-US" dirty="0"/>
-                        <a:t>Results before adaption </a:t>
+                        <a:rPr lang="en-US" sz="1600" b="1" dirty="0"/>
+                        <a:t>Results before adaptation </a:t>
                       </a:r>
                     </a:p>
                   </a:txBody>
@@ -15962,9 +16031,9 @@
                     <a:bodyPr/>
                     <a:lstStyle/>
                     <a:p>
-                      <a:pPr algn="l" rtl="0"/>
+                      <a:pPr algn="ctr" rtl="0"/>
                       <a:r>
-                        <a:rPr lang="en-US" sz="1800" b="0" i="0" kern="1200" dirty="0">
+                        <a:rPr lang="en-US" sz="1400" b="0" i="0" kern="1200" dirty="0">
                           <a:solidFill>
                             <a:schemeClr val="dk1"/>
                           </a:solidFill>
@@ -15973,10 +16042,25 @@
                           <a:ea typeface="+mn-ea"/>
                           <a:cs typeface="+mn-cs"/>
                         </a:rPr>
-                        <a:t>overall accuracy : 0.4281 overall </a:t>
+                        <a:t>Overall accuracy : 0.4281 </a:t>
+                      </a:r>
+                    </a:p>
+                    <a:p>
+                      <a:pPr algn="ctr" rtl="0"/>
+                      <a:r>
+                        <a:rPr lang="en-US" sz="1400" b="0" i="0" kern="1200" dirty="0">
+                          <a:solidFill>
+                            <a:schemeClr val="dk1"/>
+                          </a:solidFill>
+                          <a:effectLst/>
+                          <a:latin typeface="+mn-lt"/>
+                          <a:ea typeface="+mn-ea"/>
+                          <a:cs typeface="+mn-cs"/>
+                        </a:rPr>
+                        <a:t>Overall </a:t>
                       </a:r>
                       <a:r>
-                        <a:rPr lang="en-US" sz="1800" b="0" i="0" kern="1200" dirty="0" err="1">
+                        <a:rPr lang="en-US" sz="1400" b="0" i="0" kern="1200" dirty="0" err="1">
                           <a:solidFill>
                             <a:schemeClr val="dk1"/>
                           </a:solidFill>
@@ -15988,7 +16072,7 @@
                         <a:t>mIoU</a:t>
                       </a:r>
                       <a:r>
-                        <a:rPr lang="en-US" sz="1800" b="0" i="0" kern="1200" dirty="0">
+                        <a:rPr lang="en-US" sz="1400" b="0" i="0" kern="1200" dirty="0">
                           <a:solidFill>
                             <a:schemeClr val="dk1"/>
                           </a:solidFill>
@@ -15999,19 +16083,19 @@
                         </a:rPr>
                         <a:t> : 0.1804</a:t>
                       </a:r>
-                      <a:endParaRPr lang="en-US" dirty="0"/>
+                      <a:endParaRPr lang="en-US" sz="1400" dirty="0"/>
                     </a:p>
                   </a:txBody>
-                  <a:tcPr/>
+                  <a:tcPr anchor="ctr"/>
                 </a:tc>
                 <a:tc>
                   <a:txBody>
                     <a:bodyPr/>
                     <a:lstStyle/>
                     <a:p>
-                      <a:pPr algn="l" rtl="0"/>
+                      <a:pPr algn="ctr" rtl="0"/>
                       <a:r>
-                        <a:rPr lang="en-US" sz="1800" b="0" i="0" kern="1200" dirty="0">
+                        <a:rPr lang="en-US" sz="1400" b="0" i="0" kern="1200" dirty="0">
                           <a:solidFill>
                             <a:schemeClr val="dk1"/>
                           </a:solidFill>
@@ -16020,10 +16104,25 @@
                           <a:ea typeface="+mn-ea"/>
                           <a:cs typeface="+mn-cs"/>
                         </a:rPr>
-                        <a:t>overall accuracy : 0.3762 overall </a:t>
+                        <a:t>Overall accuracy : 0.3762 </a:t>
+                      </a:r>
+                    </a:p>
+                    <a:p>
+                      <a:pPr algn="ctr" rtl="0"/>
+                      <a:r>
+                        <a:rPr lang="en-US" sz="1400" b="0" i="0" kern="1200" dirty="0">
+                          <a:solidFill>
+                            <a:schemeClr val="dk1"/>
+                          </a:solidFill>
+                          <a:effectLst/>
+                          <a:latin typeface="+mn-lt"/>
+                          <a:ea typeface="+mn-ea"/>
+                          <a:cs typeface="+mn-cs"/>
+                        </a:rPr>
+                        <a:t>Overall </a:t>
                       </a:r>
                       <a:r>
-                        <a:rPr lang="en-US" sz="1800" b="0" i="0" kern="1200" dirty="0" err="1">
+                        <a:rPr lang="en-US" sz="1400" b="0" i="0" kern="1200" dirty="0" err="1">
                           <a:solidFill>
                             <a:schemeClr val="dk1"/>
                           </a:solidFill>
@@ -16035,7 +16134,7 @@
                         <a:t>mIoU</a:t>
                       </a:r>
                       <a:r>
-                        <a:rPr lang="en-US" sz="1800" b="0" i="0" kern="1200" dirty="0">
+                        <a:rPr lang="en-US" sz="1400" b="0" i="0" kern="1200" dirty="0">
                           <a:solidFill>
                             <a:schemeClr val="dk1"/>
                           </a:solidFill>
@@ -16046,10 +16145,72 @@
                         </a:rPr>
                         <a:t> : 0.1462</a:t>
                       </a:r>
-                      <a:endParaRPr lang="en-US" dirty="0"/>
+                      <a:endParaRPr lang="en-US" sz="1400" dirty="0"/>
                     </a:p>
                   </a:txBody>
-                  <a:tcPr/>
+                  <a:tcPr anchor="ctr"/>
+                </a:tc>
+                <a:tc>
+                  <a:txBody>
+                    <a:bodyPr/>
+                    <a:lstStyle/>
+                    <a:p>
+                      <a:pPr algn="ctr" rtl="0"/>
+                      <a:r>
+                        <a:rPr lang="en-US" sz="1400" b="0" i="0" kern="1200" dirty="0">
+                          <a:solidFill>
+                            <a:schemeClr val="dk1"/>
+                          </a:solidFill>
+                          <a:effectLst/>
+                          <a:latin typeface="+mn-lt"/>
+                          <a:ea typeface="+mn-ea"/>
+                          <a:cs typeface="+mn-cs"/>
+                        </a:rPr>
+                        <a:t>Overall accuracy : 0.3692 </a:t>
+                      </a:r>
+                    </a:p>
+                    <a:p>
+                      <a:pPr algn="ctr" rtl="0"/>
+                      <a:r>
+                        <a:rPr lang="en-US" sz="1400" b="0" i="0" kern="1200" dirty="0">
+                          <a:solidFill>
+                            <a:schemeClr val="dk1"/>
+                          </a:solidFill>
+                          <a:effectLst/>
+                          <a:latin typeface="+mn-lt"/>
+                          <a:ea typeface="+mn-ea"/>
+                          <a:cs typeface="+mn-cs"/>
+                        </a:rPr>
+                        <a:t>Overall </a:t>
+                      </a:r>
+                      <a:r>
+                        <a:rPr lang="en-US" sz="1400" b="0" i="0" kern="1200" dirty="0" err="1">
+                          <a:solidFill>
+                            <a:schemeClr val="dk1"/>
+                          </a:solidFill>
+                          <a:effectLst/>
+                          <a:latin typeface="+mn-lt"/>
+                          <a:ea typeface="+mn-ea"/>
+                          <a:cs typeface="+mn-cs"/>
+                        </a:rPr>
+                        <a:t>mIoU</a:t>
+                      </a:r>
+                      <a:r>
+                        <a:rPr lang="en-US" sz="1400" b="0" i="0" kern="1200" dirty="0">
+                          <a:solidFill>
+                            <a:schemeClr val="dk1"/>
+                          </a:solidFill>
+                          <a:effectLst/>
+                          <a:latin typeface="+mn-lt"/>
+                          <a:ea typeface="+mn-ea"/>
+                          <a:cs typeface="+mn-cs"/>
+                        </a:rPr>
+                        <a:t> : 0.1596</a:t>
+                      </a:r>
+                      <a:endParaRPr lang="en-US" sz="1400" dirty="0"/>
+                    </a:p>
+                  </a:txBody>
+                  <a:tcPr anchor="ctr"/>
                 </a:tc>
                 <a:extLst>
                   <a:ext uri="{0D108BD9-81ED-4DB2-BD59-A6C34878D82A}">
@@ -16065,7 +16226,7 @@
                     <a:p>
                       <a:pPr algn="l" rtl="0"/>
                       <a:r>
-                        <a:rPr lang="en-US" dirty="0"/>
+                        <a:rPr lang="en-US" sz="1600" b="1" dirty="0"/>
                         <a:t>Results after adaptation</a:t>
                       </a:r>
                     </a:p>
@@ -16077,9 +16238,9 @@
                     <a:bodyPr/>
                     <a:lstStyle/>
                     <a:p>
-                      <a:pPr algn="l" rtl="0"/>
+                      <a:pPr algn="ctr" rtl="0"/>
                       <a:r>
-                        <a:rPr lang="en-US" sz="1800" b="0" i="0" kern="1200" dirty="0">
+                        <a:rPr lang="en-US" sz="1400" b="0" i="0" kern="1200" dirty="0">
                           <a:solidFill>
                             <a:schemeClr val="dk1"/>
                           </a:solidFill>
@@ -16088,10 +16249,25 @@
                           <a:ea typeface="+mn-ea"/>
                           <a:cs typeface="+mn-cs"/>
                         </a:rPr>
-                        <a:t>overall accuracy : 0.0362 overall </a:t>
+                        <a:t>Overall accuracy : 0.0362 </a:t>
+                      </a:r>
+                    </a:p>
+                    <a:p>
+                      <a:pPr algn="ctr" rtl="0"/>
+                      <a:r>
+                        <a:rPr lang="en-US" sz="1400" b="0" i="0" kern="1200" dirty="0">
+                          <a:solidFill>
+                            <a:schemeClr val="dk1"/>
+                          </a:solidFill>
+                          <a:effectLst/>
+                          <a:latin typeface="+mn-lt"/>
+                          <a:ea typeface="+mn-ea"/>
+                          <a:cs typeface="+mn-cs"/>
+                        </a:rPr>
+                        <a:t>Overall </a:t>
                       </a:r>
                       <a:r>
-                        <a:rPr lang="en-US" sz="1800" b="0" i="0" kern="1200" dirty="0" err="1">
+                        <a:rPr lang="en-US" sz="1400" b="0" i="0" kern="1200" dirty="0" err="1">
                           <a:solidFill>
                             <a:schemeClr val="dk1"/>
                           </a:solidFill>
@@ -16103,7 +16279,7 @@
                         <a:t>mIoU</a:t>
                       </a:r>
                       <a:r>
-                        <a:rPr lang="en-US" sz="1800" b="0" i="0" kern="1200" dirty="0">
+                        <a:rPr lang="en-US" sz="1400" b="0" i="0" kern="1200" dirty="0">
                           <a:solidFill>
                             <a:schemeClr val="dk1"/>
                           </a:solidFill>
@@ -16114,19 +16290,19 @@
                         </a:rPr>
                         <a:t> : 0.0194</a:t>
                       </a:r>
-                      <a:endParaRPr lang="en-US" dirty="0"/>
+                      <a:endParaRPr lang="en-US" sz="1400" dirty="0"/>
                     </a:p>
                   </a:txBody>
-                  <a:tcPr/>
+                  <a:tcPr anchor="ctr"/>
                 </a:tc>
                 <a:tc>
                   <a:txBody>
                     <a:bodyPr/>
                     <a:lstStyle/>
                     <a:p>
-                      <a:pPr algn="l" rtl="0"/>
+                      <a:pPr algn="ctr" rtl="0"/>
                       <a:r>
-                        <a:rPr lang="en-US" sz="1800" b="0" i="0" kern="1200" dirty="0">
+                        <a:rPr lang="en-US" sz="1400" b="0" i="0" kern="1200" dirty="0">
                           <a:solidFill>
                             <a:schemeClr val="dk1"/>
                           </a:solidFill>
@@ -16135,10 +16311,25 @@
                           <a:ea typeface="+mn-ea"/>
                           <a:cs typeface="+mn-cs"/>
                         </a:rPr>
-                        <a:t>overall accuracy : 0.3401 overall </a:t>
+                        <a:t>Overall accuracy : 0.3401 </a:t>
+                      </a:r>
+                    </a:p>
+                    <a:p>
+                      <a:pPr algn="ctr" rtl="0"/>
+                      <a:r>
+                        <a:rPr lang="en-US" sz="1400" b="0" i="0" kern="1200" dirty="0">
+                          <a:solidFill>
+                            <a:schemeClr val="dk1"/>
+                          </a:solidFill>
+                          <a:effectLst/>
+                          <a:latin typeface="+mn-lt"/>
+                          <a:ea typeface="+mn-ea"/>
+                          <a:cs typeface="+mn-cs"/>
+                        </a:rPr>
+                        <a:t>Overall </a:t>
                       </a:r>
                       <a:r>
-                        <a:rPr lang="en-US" sz="1800" b="0" i="0" kern="1200" dirty="0" err="1">
+                        <a:rPr lang="en-US" sz="1400" b="0" i="0" kern="1200" dirty="0" err="1">
                           <a:solidFill>
                             <a:schemeClr val="dk1"/>
                           </a:solidFill>
@@ -16150,7 +16341,7 @@
                         <a:t>mIoU</a:t>
                       </a:r>
                       <a:r>
-                        <a:rPr lang="en-US" sz="1800" b="0" i="0" kern="1200" dirty="0">
+                        <a:rPr lang="en-US" sz="1400" b="0" i="0" kern="1200" dirty="0">
                           <a:solidFill>
                             <a:schemeClr val="dk1"/>
                           </a:solidFill>
@@ -16161,10 +16352,72 @@
                         </a:rPr>
                         <a:t> : 0.0793</a:t>
                       </a:r>
-                      <a:endParaRPr lang="en-US" dirty="0"/>
+                      <a:endParaRPr lang="en-US" sz="1400" dirty="0"/>
                     </a:p>
                   </a:txBody>
-                  <a:tcPr/>
+                  <a:tcPr anchor="ctr"/>
+                </a:tc>
+                <a:tc>
+                  <a:txBody>
+                    <a:bodyPr/>
+                    <a:lstStyle/>
+                    <a:p>
+                      <a:pPr algn="ctr" rtl="0"/>
+                      <a:r>
+                        <a:rPr lang="en-US" sz="1400" b="0" i="0" kern="1200" dirty="0">
+                          <a:solidFill>
+                            <a:schemeClr val="dk1"/>
+                          </a:solidFill>
+                          <a:effectLst/>
+                          <a:latin typeface="+mn-lt"/>
+                          <a:ea typeface="+mn-ea"/>
+                          <a:cs typeface="+mn-cs"/>
+                        </a:rPr>
+                        <a:t>Overall accuracy : 0.3882 </a:t>
+                      </a:r>
+                    </a:p>
+                    <a:p>
+                      <a:pPr algn="ctr" rtl="0"/>
+                      <a:r>
+                        <a:rPr lang="en-US" sz="1400" b="0" i="0" kern="1200" dirty="0">
+                          <a:solidFill>
+                            <a:schemeClr val="dk1"/>
+                          </a:solidFill>
+                          <a:effectLst/>
+                          <a:latin typeface="+mn-lt"/>
+                          <a:ea typeface="+mn-ea"/>
+                          <a:cs typeface="+mn-cs"/>
+                        </a:rPr>
+                        <a:t>Overall </a:t>
+                      </a:r>
+                      <a:r>
+                        <a:rPr lang="en-US" sz="1400" b="0" i="0" kern="1200" dirty="0" err="1">
+                          <a:solidFill>
+                            <a:schemeClr val="dk1"/>
+                          </a:solidFill>
+                          <a:effectLst/>
+                          <a:latin typeface="+mn-lt"/>
+                          <a:ea typeface="+mn-ea"/>
+                          <a:cs typeface="+mn-cs"/>
+                        </a:rPr>
+                        <a:t>mIoU</a:t>
+                      </a:r>
+                      <a:r>
+                        <a:rPr lang="en-US" sz="1400" b="0" i="0" kern="1200" dirty="0">
+                          <a:solidFill>
+                            <a:schemeClr val="dk1"/>
+                          </a:solidFill>
+                          <a:effectLst/>
+                          <a:latin typeface="+mn-lt"/>
+                          <a:ea typeface="+mn-ea"/>
+                          <a:cs typeface="+mn-cs"/>
+                        </a:rPr>
+                        <a:t> : 0.1151</a:t>
+                      </a:r>
+                      <a:endParaRPr lang="en-US" sz="1400" dirty="0"/>
+                    </a:p>
+                  </a:txBody>
+                  <a:tcPr anchor="ctr"/>
                 </a:tc>
                 <a:extLst>
                   <a:ext uri="{0D108BD9-81ED-4DB2-BD59-A6C34878D82A}">
